--- a/assets/ppts/M2.1.4_TCP_Congestion_Flow_Control.pptx
+++ b/assets/ppts/M2.1.4_TCP_Congestion_Flow_Control.pptx
@@ -9,6 +9,7 @@
     <p:sldId id="257" r:id="rId8"/>
     <p:sldId id="258" r:id="rId9"/>
     <p:sldId id="259" r:id="rId10"/>
+    <p:sldId id="260" r:id="rId11"/>
   </p:sldIdLst>
   <p:sldSz cx="12191695" cy="6858000" type="screen4x3"/>
   <p:notesSz cx="6858000" cy="9144000"/>
@@ -3142,8 +3143,8 @@
         </p:nvSpPr>
         <p:spPr>
           <a:xfrm>
-            <a:off x="822960" y="1188720"/>
-            <a:ext cx="164592" cy="4480560"/>
+            <a:off x="0" y="0"/>
+            <a:ext cx="12191695" cy="137160"/>
           </a:xfrm>
           <a:prstGeom prst="rect">
             <a:avLst/>
@@ -3179,14 +3180,57 @@
       </p:sp>
       <p:sp>
         <p:nvSpPr>
-          <p:cNvPr id="4" name="TextBox 3"/>
+          <p:cNvPr id="4" name="Rectangle 3"/>
+          <p:cNvSpPr/>
+          <p:nvPr/>
+        </p:nvSpPr>
+        <p:spPr>
+          <a:xfrm>
+            <a:off x="822960" y="1097280"/>
+            <a:ext cx="164592" cy="4663440"/>
+          </a:xfrm>
+          <a:prstGeom prst="rect">
+            <a:avLst/>
+          </a:prstGeom>
+          <a:solidFill>
+            <a:srgbClr val="D97706"/>
+          </a:solidFill>
+          <a:ln>
+            <a:noFill/>
+          </a:ln>
+        </p:spPr>
+        <p:style>
+          <a:lnRef idx="1">
+            <a:schemeClr val="accent1"/>
+          </a:lnRef>
+          <a:fillRef idx="3">
+            <a:schemeClr val="accent1"/>
+          </a:fillRef>
+          <a:effectRef idx="2">
+            <a:schemeClr val="accent1"/>
+          </a:effectRef>
+          <a:fontRef idx="minor">
+            <a:schemeClr val="lt1"/>
+          </a:fontRef>
+        </p:style>
+        <p:txBody>
+          <a:bodyPr rtlCol="0" anchor="ctr"/>
+          <a:lstStyle/>
+          <a:p>
+            <a:pPr algn="ctr"/>
+          </a:p>
+        </p:txBody>
+      </p:sp>
+      <p:sp>
+        <p:nvSpPr>
+          <p:cNvPr id="5" name="TextBox 4"/>
           <p:cNvSpPr txBox="1"/>
           <p:nvPr/>
         </p:nvSpPr>
         <p:spPr>
           <a:xfrm>
-            <a:off x="1280160" y="1097280"/>
-            <a:ext cx="10058400" cy="4663440"/>
+            <a:off x="1234440" y="1005840"/>
+            <a:ext cx="10241280" cy="4846320"/>
           </a:xfrm>
           <a:prstGeom prst="rect">
             <a:avLst/>
@@ -3201,70 +3245,165 @@
           <a:p>
             <a:pPr>
               <a:spcAft>
+                <a:spcPts val="1000"/>
+              </a:spcAft>
+              <a:defRPr b="1" sz="1300">
+                <a:solidFill>
+                  <a:srgbClr val="D97706"/>
+                </a:solidFill>
+              </a:defRPr>
+            </a:pPr>
+            <a:r>
+              <a:t>PCCST501 Computer Networks | KTU 2024 Scheme • MODULE 2 • M2.1.4</a:t>
+            </a:r>
+          </a:p>
+          <a:p>
+            <a:pPr>
+              <a:spcAft>
                 <a:spcPts val="1200"/>
               </a:spcAft>
-              <a:defRPr b="1" sz="1300">
+              <a:defRPr b="1" sz="3000">
+                <a:solidFill>
+                  <a:srgbClr val="F8FAFC"/>
+                </a:solidFill>
+              </a:defRPr>
+            </a:pPr>
+            <a:r>
+              <a:t>TCP Flow &amp; Congestion Control Mechanisms</a:t>
+            </a:r>
+          </a:p>
+          <a:p>
+            <a:pPr>
+              <a:spcAft>
+                <a:spcPts val="2400"/>
+              </a:spcAft>
+              <a:defRPr sz="1600">
+                <a:solidFill>
+                  <a:srgbClr val="94A3B8"/>
+                </a:solidFill>
+              </a:defRPr>
+            </a:pPr>
+            <a:r>
+              <a:t>Sliding Window Flow Control, Silly Window Syndrome, Congestion Window (cwnd), Slow Start, AIMD, Fast Retransmit, TCP Tahoe vs Reno</a:t>
+            </a:r>
+          </a:p>
+          <a:p>
+            <a:pPr>
+              <a:spcAft>
+                <a:spcPts val="300"/>
+              </a:spcAft>
+              <a:defRPr b="1" sz="1350">
+                <a:solidFill>
+                  <a:srgbClr val="E2E8F0"/>
+                </a:solidFill>
+              </a:defRPr>
+            </a:pPr>
+            <a:r>
+              <a:t>Prepared by: Prof. Anju Markose | Assistant Professor, Dept. of CSE | VJCET</a:t>
+            </a:r>
+          </a:p>
+          <a:p>
+            <a:pPr>
+              <a:defRPr sz="1150">
+                <a:solidFill>
+                  <a:srgbClr val="94A3B8"/>
+                </a:solidFill>
+              </a:defRPr>
+            </a:pPr>
+            <a:r>
+              <a:t>Viswajyothi College of Engineering and Technology (VJCET), Vazhakulam • KTU S5 CSE</a:t>
+            </a:r>
+          </a:p>
+        </p:txBody>
+      </p:sp>
+      <p:sp>
+        <p:nvSpPr>
+          <p:cNvPr id="6" name="Rounded Rectangle 5"/>
+          <p:cNvSpPr/>
+          <p:nvPr/>
+        </p:nvSpPr>
+        <p:spPr>
+          <a:xfrm>
+            <a:off x="8412480" y="5120640"/>
+            <a:ext cx="3017520" cy="822960"/>
+          </a:xfrm>
+          <a:prstGeom prst="roundRect">
+            <a:avLst/>
+          </a:prstGeom>
+          <a:solidFill>
+            <a:srgbClr val="1E293B"/>
+          </a:solidFill>
+          <a:ln w="12700">
+            <a:solidFill>
+              <a:srgbClr val="0E7490"/>
+            </a:solidFill>
+          </a:ln>
+        </p:spPr>
+        <p:style>
+          <a:lnRef idx="1">
+            <a:schemeClr val="accent1"/>
+          </a:lnRef>
+          <a:fillRef idx="3">
+            <a:schemeClr val="accent1"/>
+          </a:fillRef>
+          <a:effectRef idx="2">
+            <a:schemeClr val="accent1"/>
+          </a:effectRef>
+          <a:fontRef idx="minor">
+            <a:schemeClr val="lt1"/>
+          </a:fontRef>
+        </p:style>
+        <p:txBody>
+          <a:bodyPr rtlCol="0" anchor="ctr"/>
+          <a:lstStyle/>
+          <a:p>
+            <a:pPr algn="ctr"/>
+          </a:p>
+        </p:txBody>
+      </p:sp>
+      <p:sp>
+        <p:nvSpPr>
+          <p:cNvPr id="7" name="TextBox 6"/>
+          <p:cNvSpPr txBox="1"/>
+          <p:nvPr/>
+        </p:nvSpPr>
+        <p:spPr>
+          <a:xfrm>
+            <a:off x="8503920" y="5166360"/>
+            <a:ext cx="2834640" cy="731520"/>
+          </a:xfrm>
+          <a:prstGeom prst="rect">
+            <a:avLst/>
+          </a:prstGeom>
+          <a:noFill/>
+        </p:spPr>
+        <p:txBody>
+          <a:bodyPr wrap="none">
+            <a:spAutoFit/>
+          </a:bodyPr>
+          <a:lstStyle/>
+          <a:p>
+            <a:pPr>
+              <a:defRPr b="1" sz="1050">
                 <a:solidFill>
                   <a:srgbClr val="D97706"/>
                 </a:solidFill>
               </a:defRPr>
             </a:pPr>
             <a:r>
-              <a:t>PCCST501 Computer Networks | KTU 2024 Scheme • MODULE 2 • M2.1.4</a:t>
-            </a:r>
-          </a:p>
-          <a:p>
-            <a:pPr>
-              <a:spcAft>
-                <a:spcPts val="1400"/>
-              </a:spcAft>
-              <a:defRPr b="1" sz="3200">
+              <a:t>KTU B.Tech Curriculum</a:t>
+            </a:r>
+          </a:p>
+          <a:p>
+            <a:pPr>
+              <a:defRPr sz="950">
                 <a:solidFill>
                   <a:srgbClr val="F8FAFC"/>
                 </a:solidFill>
               </a:defRPr>
             </a:pPr>
             <a:r>
-              <a:t>TCP Flow &amp; Congestion Control</a:t>
-            </a:r>
-          </a:p>
-          <a:p>
-            <a:pPr>
-              <a:spcAft>
-                <a:spcPts val="2800"/>
-              </a:spcAft>
-              <a:defRPr sz="1700">
-                <a:solidFill>
-                  <a:srgbClr val="94A3B8"/>
-                </a:solidFill>
-              </a:defRPr>
-            </a:pPr>
-            <a:r>
-              <a:t>Sliding Window Flow Control, rwnd vs cwnd, Slow Start, AIMD, Fast Retransmit, Fast Recovery &amp; Tahoe vs Reno</a:t>
-            </a:r>
-          </a:p>
-          <a:p>
-            <a:pPr>
-              <a:defRPr b="1" sz="1300">
-                <a:solidFill>
-                  <a:srgbClr val="E2E8F0"/>
-                </a:solidFill>
-              </a:defRPr>
-            </a:pPr>
-            <a:r>
-              <a:t>Prepared by: Prof. Anju Markose | Assistant Professor, Dept. of CSE | VJCET</a:t>
-            </a:r>
-          </a:p>
-          <a:p>
-            <a:pPr>
-              <a:defRPr sz="1100">
-                <a:solidFill>
-                  <a:srgbClr val="94A3B8"/>
-                </a:solidFill>
-              </a:defRPr>
-            </a:pPr>
-            <a:r>
-              <a:t>Viswajyothi College of Engineering and Technology (VJCET), Vazhakulam</a:t>
+              <a:t>Official Classroom Slide Deck</a:t>
             </a:r>
           </a:p>
         </p:txBody>
@@ -3396,14 +3535,14 @@
           <a:lstStyle/>
           <a:p>
             <a:pPr>
-              <a:defRPr b="1" sz="2300">
+              <a:defRPr b="1" sz="2200">
                 <a:solidFill>
                   <a:srgbClr val="F8FAFC"/>
                 </a:solidFill>
               </a:defRPr>
             </a:pPr>
             <a:r>
-              <a:t>2.1.4.1 Flow Control &amp; Sliding Window</a:t>
+              <a:t>2.1.4.1 Flow Control &amp; Silly Window Syndrome</a:t>
             </a:r>
           </a:p>
         </p:txBody>
@@ -3451,7 +3590,7 @@
         </p:nvSpPr>
         <p:spPr>
           <a:xfrm>
-            <a:off x="731520" y="1280160"/>
+            <a:off x="731520" y="1234440"/>
             <a:ext cx="6858000" cy="4937760"/>
           </a:xfrm>
           <a:prstGeom prst="rect">
@@ -3469,7 +3608,7 @@
               <a:spcAft>
                 <a:spcPts val="200"/>
               </a:spcAft>
-              <a:defRPr b="1" sz="1500">
+              <a:defRPr b="1" sz="1450">
                 <a:solidFill>
                   <a:srgbClr val="0F1E4A"/>
                 </a:solidFill>
@@ -3482,16 +3621,16 @@
           <a:p>
             <a:pPr>
               <a:spcAft>
-                <a:spcPts val="800"/>
+                <a:spcPts val="700"/>
               </a:spcAft>
-              <a:defRPr sz="1300">
-                <a:solidFill>
-                  <a:srgbClr val="1E293B"/>
-                </a:solidFill>
-              </a:defRPr>
-            </a:pPr>
-            <a:r>
-              <a:t>   Prevents a fast sender from overflowing the receive buffer of a slow receiver.</a:t>
+              <a:defRPr sz="1250">
+                <a:solidFill>
+                  <a:srgbClr val="0F172A"/>
+                </a:solidFill>
+              </a:defRPr>
+            </a:pPr>
+            <a:r>
+              <a:t>   Matches the sender's transmission rate to the receiver's consumption rate to prevent receiver buffer overflow.</a:t>
             </a:r>
           </a:p>
           <a:p>
@@ -3499,29 +3638,29 @@
               <a:spcAft>
                 <a:spcPts val="200"/>
               </a:spcAft>
-              <a:defRPr b="1" sz="1500">
+              <a:defRPr b="1" sz="1450">
                 <a:solidFill>
                   <a:srgbClr val="0F1E4A"/>
                 </a:solidFill>
               </a:defRPr>
             </a:pPr>
             <a:r>
-              <a:t>• Sliding Window Mechanism</a:t>
+              <a:t>• Receive Window (`rwnd`) Mechanics</a:t>
             </a:r>
           </a:p>
           <a:p>
             <a:pPr>
               <a:spcAft>
-                <a:spcPts val="800"/>
+                <a:spcPts val="700"/>
               </a:spcAft>
-              <a:defRPr sz="1300">
-                <a:solidFill>
-                  <a:srgbClr val="1E293B"/>
-                </a:solidFill>
-              </a:defRPr>
-            </a:pPr>
-            <a:r>
-              <a:t>   Receiver advertises its available buffer space in the `Receive Window (rwnd)` header field: $rwnd = RcvBuffer - (LastByteRcvd - LastByteRead)$.</a:t>
+              <a:defRPr sz="1250">
+                <a:solidFill>
+                  <a:srgbClr val="0F172A"/>
+                </a:solidFill>
+              </a:defRPr>
+            </a:pPr>
+            <a:r>
+              <a:t>   Receiver advertises remaining buffer space via `rwnd` field in TCP header. Sender ensures: $\text{LastByteSent} - \text{LastByteAcked} \le \min(\text{cwnd}, \text{rwnd})$.</a:t>
             </a:r>
           </a:p>
           <a:p>
@@ -3529,29 +3668,29 @@
               <a:spcAft>
                 <a:spcPts val="200"/>
               </a:spcAft>
-              <a:defRPr b="1" sz="1500">
+              <a:defRPr b="1" sz="1450">
                 <a:solidFill>
                   <a:srgbClr val="0F1E4A"/>
                 </a:solidFill>
               </a:defRPr>
             </a:pPr>
             <a:r>
-              <a:t>• Sender Constraint</a:t>
+              <a:t>• Zero-Window Probing</a:t>
             </a:r>
           </a:p>
           <a:p>
             <a:pPr>
               <a:spcAft>
-                <a:spcPts val="800"/>
+                <a:spcPts val="700"/>
               </a:spcAft>
-              <a:defRPr sz="1300">
-                <a:solidFill>
-                  <a:srgbClr val="1E293B"/>
-                </a:solidFill>
-              </a:defRPr>
-            </a:pPr>
-            <a:r>
-              <a:t>   Sender ensures unacknowledged inflight bytes never exceed $rwnd$: $LastByteSent - LastByteAcked \le rwnd$.</a:t>
+              <a:defRPr sz="1250">
+                <a:solidFill>
+                  <a:srgbClr val="0F172A"/>
+                </a:solidFill>
+              </a:defRPr>
+            </a:pPr>
+            <a:r>
+              <a:t>   When receiver buffer is full (`rwnd = 0`), sender stops transmitting but periodically sends 1-byte probe segments to force receiver to return window update ACKs.</a:t>
             </a:r>
           </a:p>
           <a:p>
@@ -3559,29 +3698,29 @@
               <a:spcAft>
                 <a:spcPts val="200"/>
               </a:spcAft>
-              <a:defRPr b="1" sz="1500">
+              <a:defRPr b="1" sz="1450">
                 <a:solidFill>
                   <a:srgbClr val="0F1E4A"/>
                 </a:solidFill>
               </a:defRPr>
             </a:pPr>
             <a:r>
-              <a:t>• Zero-Window Probing</a:t>
+              <a:t>• Silly Window Syndrome (SWS)</a:t>
             </a:r>
           </a:p>
           <a:p>
             <a:pPr>
               <a:spcAft>
-                <a:spcPts val="800"/>
+                <a:spcPts val="700"/>
               </a:spcAft>
-              <a:defRPr sz="1300">
-                <a:solidFill>
-                  <a:srgbClr val="1E293B"/>
-                </a:solidFill>
-              </a:defRPr>
-            </a:pPr>
-            <a:r>
-              <a:t>   When $rwnd = 0$, sender pauses data but periodically sends 1-byte probe segments to trigger receiver window update advertisements.</a:t>
+              <a:defRPr sz="1250">
+                <a:solidFill>
+                  <a:srgbClr val="0F172A"/>
+                </a:solidFill>
+              </a:defRPr>
+            </a:pPr>
+            <a:r>
+              <a:t>   Occurs when data is transmitted in tiny chunks (1 byte payload + 40 bytes header = 97.5% overhead).</a:t>
             </a:r>
           </a:p>
           <a:p>
@@ -3589,29 +3728,29 @@
               <a:spcAft>
                 <a:spcPts val="200"/>
               </a:spcAft>
-              <a:defRPr b="1" sz="1500">
+              <a:defRPr b="1" sz="1450">
                 <a:solidFill>
                   <a:srgbClr val="0F1E4A"/>
                 </a:solidFill>
               </a:defRPr>
             </a:pPr>
             <a:r>
-              <a:t>• Silly Window Syndrome</a:t>
+              <a:t>• SWS Solutions</a:t>
             </a:r>
           </a:p>
           <a:p>
             <a:pPr>
               <a:spcAft>
-                <a:spcPts val="800"/>
+                <a:spcPts val="700"/>
               </a:spcAft>
-              <a:defRPr sz="1300">
-                <a:solidFill>
-                  <a:srgbClr val="1E293B"/>
-                </a:solidFill>
-              </a:defRPr>
-            </a:pPr>
-            <a:r>
-              <a:t>   Sender sends tiny packets (1 byte payload + 40B header) or receiver advertises tiny buffer. Solved by Nagle's Algorithm (sender buffering) and Clark's Solution (receiver delays advertising until MSS space free).</a:t>
+              <a:defRPr sz="1250">
+                <a:solidFill>
+                  <a:srgbClr val="0F172A"/>
+                </a:solidFill>
+              </a:defRPr>
+            </a:pPr>
+            <a:r>
+              <a:t>   1. **Nagle's Algorithm (Sender-side)**: Send first small segment; buffer subsequent data until all previous data is ACKed or MSS is reached. 2. **Clark's Solution (Receiver-side)**: Receiver advertises `rwnd = 0` until buffer space is at least MSS or 50% buffer capacity.</a:t>
             </a:r>
           </a:p>
         </p:txBody>
@@ -3624,14 +3763,14 @@
         </p:nvSpPr>
         <p:spPr>
           <a:xfrm>
-            <a:off x="7955279" y="1280160"/>
-            <a:ext cx="3566160" cy="4846320"/>
+            <a:off x="7955279" y="1234440"/>
+            <a:ext cx="3566160" cy="4892040"/>
           </a:xfrm>
           <a:prstGeom prst="roundRect">
             <a:avLst/>
           </a:prstGeom>
           <a:solidFill>
-            <a:srgbClr val="F1F5F9"/>
+            <a:srgbClr val="F8FAFC"/>
           </a:solidFill>
           <a:ln w="19050">
             <a:solidFill>
@@ -3669,7 +3808,7 @@
         </p:nvSpPr>
         <p:spPr>
           <a:xfrm>
-            <a:off x="8138160" y="1417320"/>
+            <a:off x="8138160" y="1371600"/>
             <a:ext cx="3200400" cy="4572000"/>
           </a:xfrm>
           <a:prstGeom prst="rect">
@@ -3694,7 +3833,7 @@
               </a:defRPr>
             </a:pPr>
             <a:r>
-              <a:t>Flow Control Terms</a:t>
+              <a:t>Key Variables</a:t>
             </a:r>
           </a:p>
           <a:p>
@@ -3704,12 +3843,12 @@
               </a:spcAft>
               <a:defRPr sz="1200">
                 <a:solidFill>
-                  <a:srgbClr val="1E293B"/>
-                </a:solidFill>
-              </a:defRPr>
-            </a:pPr>
-            <a:r>
-              <a:t>→ rwnd: Receiver advertised window</a:t>
+                  <a:srgbClr val="0F172A"/>
+                </a:solidFill>
+              </a:defRPr>
+            </a:pPr>
+            <a:r>
+              <a:t>→ rwnd: Receiver buffer limit</a:t>
             </a:r>
           </a:p>
           <a:p>
@@ -3719,12 +3858,12 @@
               </a:spcAft>
               <a:defRPr sz="1200">
                 <a:solidFill>
-                  <a:srgbClr val="1E293B"/>
-                </a:solidFill>
-              </a:defRPr>
-            </a:pPr>
-            <a:r>
-              <a:t>→ Effective Win = min(cwnd, rwnd)</a:t>
+                  <a:srgbClr val="0F172A"/>
+                </a:solidFill>
+              </a:defRPr>
+            </a:pPr>
+            <a:r>
+              <a:t>→ cwnd: Network congestion limit</a:t>
             </a:r>
           </a:p>
           <a:p>
@@ -3734,12 +3873,12 @@
               </a:spcAft>
               <a:defRPr sz="1200">
                 <a:solidFill>
-                  <a:srgbClr val="1E293B"/>
-                </a:solidFill>
-              </a:defRPr>
-            </a:pPr>
-            <a:r>
-              <a:t>→ Nagle's: Buffers small packets</a:t>
+                  <a:srgbClr val="0F172A"/>
+                </a:solidFill>
+              </a:defRPr>
+            </a:pPr>
+            <a:r>
+              <a:t>→ Effective Win = min(cwnd, rwnd)</a:t>
             </a:r>
           </a:p>
           <a:p>
@@ -3749,12 +3888,27 @@
               </a:spcAft>
               <a:defRPr sz="1200">
                 <a:solidFill>
-                  <a:srgbClr val="1E293B"/>
-                </a:solidFill>
-              </a:defRPr>
-            </a:pPr>
-            <a:r>
-              <a:t>→ Clark's: Avoids advertising tiny rwnd</a:t>
+                  <a:srgbClr val="0F172A"/>
+                </a:solidFill>
+              </a:defRPr>
+            </a:pPr>
+            <a:r>
+              <a:t>→ Nagle's: Buffers small writes</a:t>
+            </a:r>
+          </a:p>
+          <a:p>
+            <a:pPr>
+              <a:spcAft>
+                <a:spcPts val="600"/>
+              </a:spcAft>
+              <a:defRPr sz="1200">
+                <a:solidFill>
+                  <a:srgbClr val="0F172A"/>
+                </a:solidFill>
+              </a:defRPr>
+            </a:pPr>
+            <a:r>
+              <a:t>→ Clark's: Suppresses tiny rwnd</a:t>
             </a:r>
           </a:p>
         </p:txBody>
@@ -3767,8 +3921,8 @@
         </p:nvSpPr>
         <p:spPr>
           <a:xfrm>
-            <a:off x="731520" y="6309360"/>
-            <a:ext cx="10789920" cy="365760"/>
+            <a:off x="731520" y="6327648"/>
+            <a:ext cx="10789920" cy="320040"/>
           </a:xfrm>
           <a:prstGeom prst="rect">
             <a:avLst/>
@@ -3790,6 +3944,41 @@
             </a:pPr>
             <a:r>
               <a:t>PCCST501 Computer Networks | KTU 2024 Scheme | Prof. Anju Markose | Assistant Professor, Dept. of CSE | VJCET</a:t>
+            </a:r>
+          </a:p>
+        </p:txBody>
+      </p:sp>
+      <p:sp>
+        <p:nvSpPr>
+          <p:cNvPr id="10" name="TextBox 9"/>
+          <p:cNvSpPr txBox="1"/>
+          <p:nvPr/>
+        </p:nvSpPr>
+        <p:spPr>
+          <a:xfrm>
+            <a:off x="6858000" y="6327648"/>
+            <a:ext cx="4572000" cy="320040"/>
+          </a:xfrm>
+          <a:prstGeom prst="rect">
+            <a:avLst/>
+          </a:prstGeom>
+          <a:noFill/>
+        </p:spPr>
+        <p:txBody>
+          <a:bodyPr wrap="none">
+            <a:spAutoFit/>
+          </a:bodyPr>
+          <a:lstStyle/>
+          <a:p>
+            <a:pPr algn="r">
+              <a:defRPr sz="950">
+                <a:solidFill>
+                  <a:srgbClr val="64748B"/>
+                </a:solidFill>
+              </a:defRPr>
+            </a:pPr>
+            <a:r>
+              <a:t>Dept. of CSE, VJCET</a:t>
             </a:r>
           </a:p>
         </p:txBody>
@@ -3921,14 +4110,14 @@
           <a:lstStyle/>
           <a:p>
             <a:pPr>
-              <a:defRPr b="1" sz="2300">
+              <a:defRPr b="1" sz="2200">
                 <a:solidFill>
                   <a:srgbClr val="F8FAFC"/>
                 </a:solidFill>
               </a:defRPr>
             </a:pPr>
             <a:r>
-              <a:t>2.1.4.2 Congestion Control: Slow Start &amp; AIMD</a:t>
+              <a:t>2.1.4.2 Congestion Control: TCP Tahoe vs TCP Reno</a:t>
             </a:r>
           </a:p>
         </p:txBody>
@@ -3963,174 +4152,31 @@
               </a:defRPr>
             </a:pPr>
             <a:r>
-              <a:t>M2.1.4 CONGESTION PHASES</a:t>
-            </a:r>
-          </a:p>
-        </p:txBody>
-      </p:sp>
-      <p:sp>
-        <p:nvSpPr>
-          <p:cNvPr id="6" name="TextBox 5"/>
-          <p:cNvSpPr txBox="1"/>
-          <p:nvPr/>
-        </p:nvSpPr>
-        <p:spPr>
-          <a:xfrm>
-            <a:off x="731520" y="1280160"/>
-            <a:ext cx="6858000" cy="4937760"/>
-          </a:xfrm>
-          <a:prstGeom prst="rect">
-            <a:avLst/>
-          </a:prstGeom>
-          <a:noFill/>
-        </p:spPr>
-        <p:txBody>
-          <a:bodyPr wrap="square">
-            <a:spAutoFit/>
-          </a:bodyPr>
-          <a:lstStyle/>
-          <a:p>
-            <a:pPr>
-              <a:spcAft>
-                <a:spcPts val="200"/>
-              </a:spcAft>
-              <a:defRPr b="1" sz="1500">
-                <a:solidFill>
-                  <a:srgbClr val="0F1E4A"/>
-                </a:solidFill>
-              </a:defRPr>
-            </a:pPr>
-            <a:r>
-              <a:t>• Congestion Window (`cwnd`)</a:t>
-            </a:r>
-          </a:p>
-          <a:p>
-            <a:pPr>
-              <a:spcAft>
-                <a:spcPts val="800"/>
-              </a:spcAft>
-              <a:defRPr sz="1300">
-                <a:solidFill>
-                  <a:srgbClr val="1E293B"/>
-                </a:solidFill>
-              </a:defRPr>
-            </a:pPr>
-            <a:r>
-              <a:t>   Dynamic limit on unacknowledged bytes maintained by sender based on perceived network congestion. Max unacked data $= \min(cwnd, rwnd)$.</a:t>
-            </a:r>
-          </a:p>
-          <a:p>
-            <a:pPr>
-              <a:spcAft>
-                <a:spcPts val="200"/>
-              </a:spcAft>
-              <a:defRPr b="1" sz="1500">
-                <a:solidFill>
-                  <a:srgbClr val="0F1E4A"/>
-                </a:solidFill>
-              </a:defRPr>
-            </a:pPr>
-            <a:r>
-              <a:t>• Slow Start Phase</a:t>
-            </a:r>
-          </a:p>
-          <a:p>
-            <a:pPr>
-              <a:spcAft>
-                <a:spcPts val="800"/>
-              </a:spcAft>
-              <a:defRPr sz="1300">
-                <a:solidFill>
-                  <a:srgbClr val="1E293B"/>
-                </a:solidFill>
-              </a:defRPr>
-            </a:pPr>
-            <a:r>
-              <a:t>   Begins with $cwnd = 1 \text{ MSS}$. cwnd increases by 1 MSS for every ACK received $\implies$ cwnd DOUBLES every Round Trip Time (RTT) [Exponential Growth]. Continues until $cwnd \ge ssthresh$ (slow start threshold).</a:t>
-            </a:r>
-          </a:p>
-          <a:p>
-            <a:pPr>
-              <a:spcAft>
-                <a:spcPts val="200"/>
-              </a:spcAft>
-              <a:defRPr b="1" sz="1500">
-                <a:solidFill>
-                  <a:srgbClr val="0F1E4A"/>
-                </a:solidFill>
-              </a:defRPr>
-            </a:pPr>
-            <a:r>
-              <a:t>• Congestion Avoidance (AIMD)</a:t>
-            </a:r>
-          </a:p>
-          <a:p>
-            <a:pPr>
-              <a:spcAft>
-                <a:spcPts val="800"/>
-              </a:spcAft>
-              <a:defRPr sz="1300">
-                <a:solidFill>
-                  <a:srgbClr val="1E293B"/>
-                </a:solidFill>
-              </a:defRPr>
-            </a:pPr>
-            <a:r>
-              <a:t>   Additive Increase: $cwnd$ increases by 1 MSS per RTT (linear growth) to probe for bandwidth safely.</a:t>
-            </a:r>
-          </a:p>
-          <a:p>
-            <a:pPr>
-              <a:spcAft>
-                <a:spcPts val="200"/>
-              </a:spcAft>
-              <a:defRPr b="1" sz="1500">
-                <a:solidFill>
-                  <a:srgbClr val="0F1E4A"/>
-                </a:solidFill>
-              </a:defRPr>
-            </a:pPr>
-            <a:r>
-              <a:t>• Multiplicative Decrease</a:t>
-            </a:r>
-          </a:p>
-          <a:p>
-            <a:pPr>
-              <a:spcAft>
-                <a:spcPts val="800"/>
-              </a:spcAft>
-              <a:defRPr sz="1300">
-                <a:solidFill>
-                  <a:srgbClr val="1E293B"/>
-                </a:solidFill>
-              </a:defRPr>
-            </a:pPr>
-            <a:r>
-              <a:t>   On congestion detection, sender throttles transmission rate aggressively by halving the threshold: $ssthresh = cwnd / 2$.</a:t>
-            </a:r>
-          </a:p>
-        </p:txBody>
-      </p:sp>
-      <p:sp>
-        <p:nvSpPr>
-          <p:cNvPr id="7" name="Rounded Rectangle 6"/>
+              <a:t>M2.1.4 TAHOE VS RENO</a:t>
+            </a:r>
+          </a:p>
+        </p:txBody>
+      </p:sp>
+      <p:sp>
+        <p:nvSpPr>
+          <p:cNvPr id="6" name="Rounded Rectangle 5"/>
           <p:cNvSpPr/>
           <p:nvPr/>
         </p:nvSpPr>
         <p:spPr>
           <a:xfrm>
-            <a:off x="7955279" y="1280160"/>
-            <a:ext cx="3566160" cy="4846320"/>
+            <a:off x="731520" y="1234440"/>
+            <a:ext cx="5212080" cy="4892040"/>
           </a:xfrm>
           <a:prstGeom prst="roundRect">
             <a:avLst/>
           </a:prstGeom>
           <a:solidFill>
-            <a:srgbClr val="F1F5F9"/>
+            <a:srgbClr val="F8FAFC"/>
           </a:solidFill>
           <a:ln w="19050">
             <a:solidFill>
-              <a:srgbClr val="0E7490"/>
+              <a:srgbClr val="0F1E4A"/>
             </a:solidFill>
           </a:ln>
         </p:spPr>
@@ -4158,14 +4204,14 @@
       </p:sp>
       <p:sp>
         <p:nvSpPr>
-          <p:cNvPr id="8" name="TextBox 7"/>
+          <p:cNvPr id="7" name="TextBox 6"/>
           <p:cNvSpPr txBox="1"/>
           <p:nvPr/>
         </p:nvSpPr>
         <p:spPr>
           <a:xfrm>
-            <a:off x="8138160" y="1417320"/>
-            <a:ext cx="3200400" cy="4572000"/>
+            <a:off x="914400" y="1371600"/>
+            <a:ext cx="4846320" cy="4572000"/>
           </a:xfrm>
           <a:prstGeom prst="rect">
             <a:avLst/>
@@ -4182,60 +4228,120 @@
               <a:spcAft>
                 <a:spcPts val="1000"/>
               </a:spcAft>
-              <a:defRPr b="1" sz="1500">
-                <a:solidFill>
-                  <a:srgbClr val="0E7490"/>
-                </a:solidFill>
-              </a:defRPr>
-            </a:pPr>
-            <a:r>
-              <a:t>Congestion Formulas</a:t>
+              <a:defRPr b="1" sz="1550">
+                <a:solidFill>
+                  <a:srgbClr val="0F1E4A"/>
+                </a:solidFill>
+              </a:defRPr>
+            </a:pPr>
+            <a:r>
+              <a:t>TCP Tahoe (Legacy)</a:t>
             </a:r>
           </a:p>
           <a:p>
             <a:pPr>
               <a:spcAft>
-                <a:spcPts val="600"/>
+                <a:spcPts val="500"/>
               </a:spcAft>
               <a:defRPr sz="1200">
                 <a:solidFill>
-                  <a:srgbClr val="1E293B"/>
-                </a:solidFill>
-              </a:defRPr>
-            </a:pPr>
-            <a:r>
-              <a:t>→ Slow Start: cwnd *= 2 per RTT</a:t>
+                  <a:srgbClr val="0F172A"/>
+                </a:solidFill>
+              </a:defRPr>
+            </a:pPr>
+            <a:r>
+              <a:t>• Slow Start Phase: Begins with `cwnd = 1 MSS`. Increases `cwnd` exponentially: doubles every RTT (`cwnd += 1 MSS` per ACK received)</a:t>
             </a:r>
           </a:p>
           <a:p>
             <a:pPr>
               <a:spcAft>
-                <a:spcPts val="600"/>
+                <a:spcPts val="500"/>
               </a:spcAft>
               <a:defRPr sz="1200">
                 <a:solidFill>
-                  <a:srgbClr val="1E293B"/>
-                </a:solidFill>
-              </a:defRPr>
-            </a:pPr>
-            <a:r>
-              <a:t>→ Congestion Avoidance: cwnd += 1 MSS/RTT</a:t>
+                  <a:srgbClr val="0F172A"/>
+                </a:solidFill>
+              </a:defRPr>
+            </a:pPr>
+            <a:r>
+              <a:t>• Congestion Avoidance: When `cwnd &gt;= ssthresh`, transitions to AIMD: increases `cwnd` linearly by 1 MSS per RTT</a:t>
             </a:r>
           </a:p>
           <a:p>
             <a:pPr>
               <a:spcAft>
-                <a:spcPts val="600"/>
+                <a:spcPts val="500"/>
               </a:spcAft>
               <a:defRPr sz="1200">
                 <a:solidFill>
-                  <a:srgbClr val="1E293B"/>
-                </a:solidFill>
-              </a:defRPr>
-            </a:pPr>
-            <a:r>
-              <a:t>→ Threshold on Loss: ssthresh = cwnd / 2</a:t>
-            </a:r>
+                  <a:srgbClr val="0F172A"/>
+                </a:solidFill>
+              </a:defRPr>
+            </a:pPr>
+            <a:r>
+              <a:t>• On Loss Detection (Timeout or 3 Dup ACKs): 1. `ssthresh = cwnd / 2` \n 2. Drops `cwnd = 1 MSS` (always resets to slow start)</a:t>
+            </a:r>
+          </a:p>
+          <a:p>
+            <a:pPr>
+              <a:spcAft>
+                <a:spcPts val="500"/>
+              </a:spcAft>
+              <a:defRPr sz="1200">
+                <a:solidFill>
+                  <a:srgbClr val="0F172A"/>
+                </a:solidFill>
+              </a:defRPr>
+            </a:pPr>
+            <a:r>
+              <a:t>• Performance: Severe throughput collapse upon any single packet loss</a:t>
+            </a:r>
+          </a:p>
+        </p:txBody>
+      </p:sp>
+      <p:sp>
+        <p:nvSpPr>
+          <p:cNvPr id="8" name="Rounded Rectangle 7"/>
+          <p:cNvSpPr/>
+          <p:nvPr/>
+        </p:nvSpPr>
+        <p:spPr>
+          <a:xfrm>
+            <a:off x="6309360" y="1234440"/>
+            <a:ext cx="5212080" cy="4892040"/>
+          </a:xfrm>
+          <a:prstGeom prst="roundRect">
+            <a:avLst/>
+          </a:prstGeom>
+          <a:solidFill>
+            <a:srgbClr val="EEF2FF"/>
+          </a:solidFill>
+          <a:ln w="19050">
+            <a:solidFill>
+              <a:srgbClr val="0E7490"/>
+            </a:solidFill>
+          </a:ln>
+        </p:spPr>
+        <p:style>
+          <a:lnRef idx="1">
+            <a:schemeClr val="accent1"/>
+          </a:lnRef>
+          <a:fillRef idx="3">
+            <a:schemeClr val="accent1"/>
+          </a:fillRef>
+          <a:effectRef idx="2">
+            <a:schemeClr val="accent1"/>
+          </a:effectRef>
+          <a:fontRef idx="minor">
+            <a:schemeClr val="lt1"/>
+          </a:fontRef>
+        </p:style>
+        <p:txBody>
+          <a:bodyPr rtlCol="0" anchor="ctr"/>
+          <a:lstStyle/>
+          <a:p>
+            <a:pPr algn="ctr"/>
           </a:p>
         </p:txBody>
       </p:sp>
@@ -4247,8 +4353,8 @@
         </p:nvSpPr>
         <p:spPr>
           <a:xfrm>
-            <a:off x="731520" y="6309360"/>
-            <a:ext cx="10789920" cy="365760"/>
+            <a:off x="6492240" y="1371600"/>
+            <a:ext cx="4846320" cy="4572000"/>
           </a:xfrm>
           <a:prstGeom prst="rect">
             <a:avLst/>
@@ -4256,6 +4362,104 @@
           <a:noFill/>
         </p:spPr>
         <p:txBody>
+          <a:bodyPr wrap="square">
+            <a:spAutoFit/>
+          </a:bodyPr>
+          <a:lstStyle/>
+          <a:p>
+            <a:pPr>
+              <a:spcAft>
+                <a:spcPts val="1000"/>
+              </a:spcAft>
+              <a:defRPr b="1" sz="1550">
+                <a:solidFill>
+                  <a:srgbClr val="0E7490"/>
+                </a:solidFill>
+              </a:defRPr>
+            </a:pPr>
+            <a:r>
+              <a:t>TCP Reno (Standard)</a:t>
+            </a:r>
+          </a:p>
+          <a:p>
+            <a:pPr>
+              <a:spcAft>
+                <a:spcPts val="500"/>
+              </a:spcAft>
+              <a:defRPr sz="1200">
+                <a:solidFill>
+                  <a:srgbClr val="0F172A"/>
+                </a:solidFill>
+              </a:defRPr>
+            </a:pPr>
+            <a:r>
+              <a:t>• Slow Start &amp; Congestion Avoidance: Identical to Tahoe during normal growth</a:t>
+            </a:r>
+          </a:p>
+          <a:p>
+            <a:pPr>
+              <a:spcAft>
+                <a:spcPts val="500"/>
+              </a:spcAft>
+              <a:defRPr sz="1200">
+                <a:solidFill>
+                  <a:srgbClr val="0F172A"/>
+                </a:solidFill>
+              </a:defRPr>
+            </a:pPr>
+            <a:r>
+              <a:t>• On Timeout Loss: Severe congestion: `ssthresh = cwnd / 2`, `cwnd = 1 MSS` (resets to Slow Start)</a:t>
+            </a:r>
+          </a:p>
+          <a:p>
+            <a:pPr>
+              <a:spcAft>
+                <a:spcPts val="500"/>
+              </a:spcAft>
+              <a:defRPr sz="1200">
+                <a:solidFill>
+                  <a:srgbClr val="0F172A"/>
+                </a:solidFill>
+              </a:defRPr>
+            </a:pPr>
+            <a:r>
+              <a:t>• On 3 Duplicate ACKs (Fast Retransmit): Mild congestion: Retransmits lost segment immediately without waiting for retransmission timer to expire</a:t>
+            </a:r>
+          </a:p>
+          <a:p>
+            <a:pPr>
+              <a:spcAft>
+                <a:spcPts val="500"/>
+              </a:spcAft>
+              <a:defRPr sz="1200">
+                <a:solidFill>
+                  <a:srgbClr val="0F172A"/>
+                </a:solidFill>
+              </a:defRPr>
+            </a:pPr>
+            <a:r>
+              <a:t>• Fast Recovery Phase: Skips slow start! Sets `ssthresh = cwnd / 2`, sets `cwnd = ssthresh + 3 MSS`, continues linear AIMD growth</a:t>
+            </a:r>
+          </a:p>
+        </p:txBody>
+      </p:sp>
+      <p:sp>
+        <p:nvSpPr>
+          <p:cNvPr id="10" name="TextBox 9"/>
+          <p:cNvSpPr txBox="1"/>
+          <p:nvPr/>
+        </p:nvSpPr>
+        <p:spPr>
+          <a:xfrm>
+            <a:off x="731520" y="6327648"/>
+            <a:ext cx="10789920" cy="320040"/>
+          </a:xfrm>
+          <a:prstGeom prst="rect">
+            <a:avLst/>
+          </a:prstGeom>
+          <a:noFill/>
+        </p:spPr>
+        <p:txBody>
           <a:bodyPr wrap="none">
             <a:spAutoFit/>
           </a:bodyPr>
@@ -4270,6 +4474,41 @@
             </a:pPr>
             <a:r>
               <a:t>PCCST501 Computer Networks | KTU 2024 Scheme | Prof. Anju Markose | Assistant Professor, Dept. of CSE | VJCET</a:t>
+            </a:r>
+          </a:p>
+        </p:txBody>
+      </p:sp>
+      <p:sp>
+        <p:nvSpPr>
+          <p:cNvPr id="11" name="TextBox 10"/>
+          <p:cNvSpPr txBox="1"/>
+          <p:nvPr/>
+        </p:nvSpPr>
+        <p:spPr>
+          <a:xfrm>
+            <a:off x="6858000" y="6327648"/>
+            <a:ext cx="4572000" cy="320040"/>
+          </a:xfrm>
+          <a:prstGeom prst="rect">
+            <a:avLst/>
+          </a:prstGeom>
+          <a:noFill/>
+        </p:spPr>
+        <p:txBody>
+          <a:bodyPr wrap="none">
+            <a:spAutoFit/>
+          </a:bodyPr>
+          <a:lstStyle/>
+          <a:p>
+            <a:pPr algn="r">
+              <a:defRPr sz="950">
+                <a:solidFill>
+                  <a:srgbClr val="64748B"/>
+                </a:solidFill>
+              </a:defRPr>
+            </a:pPr>
+            <a:r>
+              <a:t>Dept. of CSE, VJCET</a:t>
             </a:r>
           </a:p>
         </p:txBody>
@@ -4401,14 +4640,14 @@
           <a:lstStyle/>
           <a:p>
             <a:pPr>
-              <a:defRPr b="1" sz="2300">
+              <a:defRPr b="1" sz="2200">
                 <a:solidFill>
                   <a:srgbClr val="F8FAFC"/>
                 </a:solidFill>
               </a:defRPr>
             </a:pPr>
             <a:r>
-              <a:t>2.1.4.3 Loss Recovery: TCP Tahoe vs TCP Reno</a:t>
+              <a:t>2.1.4.3 Worked KTU Numerical: TCP Congestion Window Evolution</a:t>
             </a:r>
           </a:p>
         </p:txBody>
@@ -4443,7 +4682,7 @@
               </a:defRPr>
             </a:pPr>
             <a:r>
-              <a:t>M2.1.4 TAHOE VS RENO</a:t>
+              <a:t>M2.1.4 WORKED PROBLEM</a:t>
             </a:r>
           </a:p>
         </p:txBody>
@@ -4456,18 +4695,18 @@
         </p:nvSpPr>
         <p:spPr>
           <a:xfrm>
-            <a:off x="731520" y="1280160"/>
-            <a:ext cx="5212080" cy="4846320"/>
+            <a:off x="731520" y="1234440"/>
+            <a:ext cx="5486400" cy="4892040"/>
           </a:xfrm>
           <a:prstGeom prst="roundRect">
             <a:avLst/>
           </a:prstGeom>
           <a:solidFill>
-            <a:srgbClr val="F1F5F9"/>
+            <a:srgbClr val="F8FAFC"/>
           </a:solidFill>
           <a:ln w="19050">
             <a:solidFill>
-              <a:srgbClr val="0E7490"/>
+              <a:srgbClr val="0F1E4A"/>
             </a:solidFill>
           </a:ln>
         </p:spPr>
@@ -4501,8 +4740,8 @@
         </p:nvSpPr>
         <p:spPr>
           <a:xfrm>
-            <a:off x="914400" y="1417320"/>
-            <a:ext cx="4846320" cy="4572000"/>
+            <a:off x="914400" y="1371600"/>
+            <a:ext cx="5120640" cy="4572000"/>
           </a:xfrm>
           <a:prstGeom prst="rect">
             <a:avLst/>
@@ -4517,16 +4756,31 @@
           <a:p>
             <a:pPr>
               <a:spcAft>
-                <a:spcPts val="1200"/>
+                <a:spcPts val="800"/>
               </a:spcAft>
-              <a:defRPr b="1" sz="1600">
+              <a:defRPr b="1" sz="1450">
                 <a:solidFill>
                   <a:srgbClr val="0F1E4A"/>
                 </a:solidFill>
               </a:defRPr>
             </a:pPr>
             <a:r>
-              <a:t>TCP Tahoe (Legacy)</a:t>
+              <a:t>📌 KTU Numerical Problem Statement</a:t>
+            </a:r>
+          </a:p>
+          <a:p>
+            <a:pPr>
+              <a:spcAft>
+                <a:spcPts val="1400"/>
+              </a:spcAft>
+              <a:defRPr sz="1250">
+                <a:solidFill>
+                  <a:srgbClr val="0F172A"/>
+                </a:solidFill>
+              </a:defRPr>
+            </a:pPr>
+            <a:r>
+              <a:t>A TCP Reno connection has ssthresh = 16 MSS. Starting at RTT 1 with cwnd = 1 MSS in Slow Start: (a) Trace cwnd values up to RTT 8. (b) At RTT 8, three duplicate ACKs are received. Calculate new ssthresh and cwnd for RTT 9 and RTT 10 under Fast Recovery.</a:t>
             </a:r>
           </a:p>
           <a:p>
@@ -4534,59 +4788,59 @@
               <a:spcAft>
                 <a:spcPts val="600"/>
               </a:spcAft>
-              <a:defRPr sz="1250">
-                <a:solidFill>
-                  <a:srgbClr val="1E293B"/>
-                </a:solidFill>
-              </a:defRPr>
-            </a:pPr>
-            <a:r>
-              <a:t>• Timeout Loss: ssthresh = cwnd / 2; cwnd = 1 MSS; Enters Slow Start</a:t>
+              <a:defRPr b="1" sz="1350">
+                <a:solidFill>
+                  <a:srgbClr val="0E7490"/>
+                </a:solidFill>
+              </a:defRPr>
+            </a:pPr>
+            <a:r>
+              <a:t>📐 Governing Formulas &amp; Principles:</a:t>
             </a:r>
           </a:p>
           <a:p>
             <a:pPr>
               <a:spcAft>
-                <a:spcPts val="600"/>
+                <a:spcPts val="400"/>
               </a:spcAft>
-              <a:defRPr sz="1250">
-                <a:solidFill>
-                  <a:srgbClr val="1E293B"/>
-                </a:solidFill>
-              </a:defRPr>
-            </a:pPr>
-            <a:r>
-              <a:t>• 3 Duplicate ACKs: ssthresh = cwnd / 2; cwnd = 1 MSS; Enters Slow Start</a:t>
+              <a:defRPr sz="1200">
+                <a:solidFill>
+                  <a:srgbClr val="0F172A"/>
+                </a:solidFill>
+              </a:defRPr>
+            </a:pPr>
+            <a:r>
+              <a:t>• Slow Start: cwnd doubles every RTT until ssthresh is reached.</a:t>
             </a:r>
           </a:p>
           <a:p>
             <a:pPr>
               <a:spcAft>
-                <a:spcPts val="600"/>
+                <a:spcPts val="400"/>
               </a:spcAft>
-              <a:defRPr sz="1250">
-                <a:solidFill>
-                  <a:srgbClr val="1E293B"/>
-                </a:solidFill>
-              </a:defRPr>
-            </a:pPr>
-            <a:r>
-              <a:t>• Fast Retransmit: Retransmits lost packet immediately upon 3rd duplicate ACK</a:t>
+              <a:defRPr sz="1200">
+                <a:solidFill>
+                  <a:srgbClr val="0F172A"/>
+                </a:solidFill>
+              </a:defRPr>
+            </a:pPr>
+            <a:r>
+              <a:t>• Congestion Avoidance (AIMD): cwnd increases by +1 MSS per RTT.</a:t>
             </a:r>
           </a:p>
           <a:p>
             <a:pPr>
               <a:spcAft>
-                <a:spcPts val="600"/>
+                <a:spcPts val="400"/>
               </a:spcAft>
-              <a:defRPr sz="1250">
-                <a:solidFill>
-                  <a:srgbClr val="1E293B"/>
-                </a:solidFill>
-              </a:defRPr>
-            </a:pPr>
-            <a:r>
-              <a:t>• Fast Recovery: NOT supported (always drops cwnd to 1 MSS)</a:t>
+              <a:defRPr sz="1200">
+                <a:solidFill>
+                  <a:srgbClr val="0F172A"/>
+                </a:solidFill>
+              </a:defRPr>
+            </a:pPr>
+            <a:r>
+              <a:t>• Fast Retransmit / Fast Recovery (3 Dup ACKs): ssthresh_new = cwnd / 2, cwnd_new = ssthresh_new.</a:t>
             </a:r>
           </a:p>
         </p:txBody>
@@ -4599,18 +4853,18 @@
         </p:nvSpPr>
         <p:spPr>
           <a:xfrm>
-            <a:off x="6309360" y="1280160"/>
-            <a:ext cx="5212080" cy="4846320"/>
+            <a:off x="6492240" y="1234440"/>
+            <a:ext cx="5029200" cy="4892040"/>
           </a:xfrm>
           <a:prstGeom prst="roundRect">
             <a:avLst/>
           </a:prstGeom>
           <a:solidFill>
-            <a:srgbClr val="EEF2FF"/>
+            <a:srgbClr val="ECFDF5"/>
           </a:solidFill>
           <a:ln w="19050">
             <a:solidFill>
-              <a:srgbClr val="0F1E4A"/>
+              <a:srgbClr val="10B981"/>
             </a:solidFill>
           </a:ln>
         </p:spPr>
@@ -4644,8 +4898,8 @@
         </p:nvSpPr>
         <p:spPr>
           <a:xfrm>
-            <a:off x="6492240" y="1417320"/>
-            <a:ext cx="4846320" cy="4572000"/>
+            <a:off x="6675120" y="1371600"/>
+            <a:ext cx="4663440" cy="4572000"/>
           </a:xfrm>
           <a:prstGeom prst="rect">
             <a:avLst/>
@@ -4660,76 +4914,118 @@
           <a:p>
             <a:pPr>
               <a:spcAft>
-                <a:spcPts val="1200"/>
+                <a:spcPts val="800"/>
               </a:spcAft>
-              <a:defRPr b="1" sz="1600">
-                <a:solidFill>
-                  <a:srgbClr val="0E7490"/>
-                </a:solidFill>
-              </a:defRPr>
-            </a:pPr>
-            <a:r>
-              <a:t>TCP Reno (Modern Standard)</a:t>
+              <a:defRPr b="1" sz="1450">
+                <a:solidFill>
+                  <a:srgbClr val="047857"/>
+                </a:solidFill>
+              </a:defRPr>
+            </a:pPr>
+            <a:r>
+              <a:t>📝 Step-by-Step Derivation &amp; Solution</a:t>
             </a:r>
           </a:p>
           <a:p>
             <a:pPr>
               <a:spcAft>
-                <a:spcPts val="600"/>
+                <a:spcPts val="500"/>
               </a:spcAft>
-              <a:defRPr sz="1250">
-                <a:solidFill>
-                  <a:srgbClr val="1E293B"/>
-                </a:solidFill>
-              </a:defRPr>
-            </a:pPr>
-            <a:r>
-              <a:t>• Timeout Loss: ssthresh = cwnd / 2; cwnd = 1 MSS; Enters Slow Start</a:t>
+              <a:defRPr sz="1200">
+                <a:solidFill>
+                  <a:srgbClr val="0F172A"/>
+                </a:solidFill>
+              </a:defRPr>
+            </a:pPr>
+            <a:r>
+              <a:t>Step 1: RTT 1: cwnd = 1 MSS (Slow Start)</a:t>
             </a:r>
           </a:p>
           <a:p>
             <a:pPr>
               <a:spcAft>
-                <a:spcPts val="600"/>
+                <a:spcPts val="500"/>
               </a:spcAft>
-              <a:defRPr sz="1250">
-                <a:solidFill>
-                  <a:srgbClr val="1E293B"/>
-                </a:solidFill>
-              </a:defRPr>
-            </a:pPr>
-            <a:r>
-              <a:t>• 3 Duplicate ACKs: ssthresh = cwnd / 2; cwnd = ssthresh + 3 MSS; Enters Fast Recovery</a:t>
+              <a:defRPr sz="1200">
+                <a:solidFill>
+                  <a:srgbClr val="0F172A"/>
+                </a:solidFill>
+              </a:defRPr>
+            </a:pPr>
+            <a:r>
+              <a:t>Step 2: RTT 2: cwnd = 2 MSS | RTT 3: cwnd = 4 MSS | RTT 4: cwnd = 8 MSS | RTT 5: cwnd = 16 MSS (ssthresh reached)</a:t>
             </a:r>
           </a:p>
           <a:p>
             <a:pPr>
               <a:spcAft>
-                <a:spcPts val="600"/>
+                <a:spcPts val="500"/>
               </a:spcAft>
-              <a:defRPr sz="1250">
-                <a:solidFill>
-                  <a:srgbClr val="1E293B"/>
-                </a:solidFill>
-              </a:defRPr>
-            </a:pPr>
-            <a:r>
-              <a:t>• Fast Retransmit: Retransmits lost segment without waiting for retransmission timer expiry</a:t>
+              <a:defRPr sz="1200">
+                <a:solidFill>
+                  <a:srgbClr val="0F172A"/>
+                </a:solidFill>
+              </a:defRPr>
+            </a:pPr>
+            <a:r>
+              <a:t>Step 3: RTT 6: cwnd = 17 MSS (AIMD Linear) | RTT 7: cwnd = 18 MSS | RTT 8: cwnd = 19 MSS</a:t>
             </a:r>
           </a:p>
           <a:p>
             <a:pPr>
               <a:spcAft>
-                <a:spcPts val="600"/>
+                <a:spcPts val="500"/>
               </a:spcAft>
-              <a:defRPr sz="1250">
-                <a:solidFill>
-                  <a:srgbClr val="1E293B"/>
-                </a:solidFill>
-              </a:defRPr>
-            </a:pPr>
-            <a:r>
-              <a:t>• Fast Recovery: Avoids dropping to 1 MSS; increments cwnd on dup ACKs and returns to Congestion Avoidance upon new ACK</a:t>
+              <a:defRPr sz="1200">
+                <a:solidFill>
+                  <a:srgbClr val="0F172A"/>
+                </a:solidFill>
+              </a:defRPr>
+            </a:pPr>
+            <a:r>
+              <a:t>Step 4: At RTT 8, 3 Dup ACKs occur: ssthresh_new = 19 / 2 = 9.5 -&gt; 9 MSS.</a:t>
+            </a:r>
+          </a:p>
+          <a:p>
+            <a:pPr>
+              <a:spcAft>
+                <a:spcPts val="500"/>
+              </a:spcAft>
+              <a:defRPr sz="1200">
+                <a:solidFill>
+                  <a:srgbClr val="0F172A"/>
+                </a:solidFill>
+              </a:defRPr>
+            </a:pPr>
+            <a:r>
+              <a:t>Step 5: RTT 9: Under TCP Reno Fast Recovery, cwnd = 9 MSS. RTT 10: cwnd = 10 MSS (continues linear AIMD).</a:t>
+            </a:r>
+          </a:p>
+          <a:p>
+            <a:pPr>
+              <a:spcAft>
+                <a:spcPts val="800"/>
+              </a:spcAft>
+              <a:defRPr b="1" sz="1300">
+                <a:solidFill>
+                  <a:srgbClr val="047857"/>
+                </a:solidFill>
+              </a:defRPr>
+            </a:pPr>
+            <a:r>
+              <a:t>✅ FINAL ANSWER: RTT 8: 19 MSS -&gt; Loss -&gt; RTT 9: cwnd = 9 MSS, ssthresh = 9 MSS</a:t>
+            </a:r>
+          </a:p>
+          <a:p>
+            <a:pPr>
+              <a:defRPr sz="1100">
+                <a:solidFill>
+                  <a:srgbClr val="64748B"/>
+                </a:solidFill>
+              </a:defRPr>
+            </a:pPr>
+            <a:r>
+              <a:t>💡 Exam Tip: If loss was caused by Timeout instead of 3 Dup ACKs, cwnd would drop to 1 MSS.</a:t>
             </a:r>
           </a:p>
         </p:txBody>
@@ -4742,8 +5038,8 @@
         </p:nvSpPr>
         <p:spPr>
           <a:xfrm>
-            <a:off x="731520" y="6309360"/>
-            <a:ext cx="10789920" cy="365760"/>
+            <a:off x="731520" y="6327648"/>
+            <a:ext cx="10789920" cy="320040"/>
           </a:xfrm>
           <a:prstGeom prst="rect">
             <a:avLst/>
@@ -4765,6 +5061,541 @@
             </a:pPr>
             <a:r>
               <a:t>PCCST501 Computer Networks | KTU 2024 Scheme | Prof. Anju Markose | Assistant Professor, Dept. of CSE | VJCET</a:t>
+            </a:r>
+          </a:p>
+        </p:txBody>
+      </p:sp>
+      <p:sp>
+        <p:nvSpPr>
+          <p:cNvPr id="11" name="TextBox 10"/>
+          <p:cNvSpPr txBox="1"/>
+          <p:nvPr/>
+        </p:nvSpPr>
+        <p:spPr>
+          <a:xfrm>
+            <a:off x="6858000" y="6327648"/>
+            <a:ext cx="4572000" cy="320040"/>
+          </a:xfrm>
+          <a:prstGeom prst="rect">
+            <a:avLst/>
+          </a:prstGeom>
+          <a:noFill/>
+        </p:spPr>
+        <p:txBody>
+          <a:bodyPr wrap="none">
+            <a:spAutoFit/>
+          </a:bodyPr>
+          <a:lstStyle/>
+          <a:p>
+            <a:pPr algn="r">
+              <a:defRPr sz="950">
+                <a:solidFill>
+                  <a:srgbClr val="64748B"/>
+                </a:solidFill>
+              </a:defRPr>
+            </a:pPr>
+            <a:r>
+              <a:t>Dept. of CSE, VJCET</a:t>
+            </a:r>
+          </a:p>
+        </p:txBody>
+      </p:sp>
+    </p:spTree>
+  </p:cSld>
+  <p:clrMapOvr>
+    <a:masterClrMapping/>
+  </p:clrMapOvr>
+</p:sld>
+</file>
+
+<file path=ppt/slides/slide5.xml><?xml version="1.0" encoding="utf-8"?>
+<p:sld xmlns:a="http://schemas.openxmlformats.org/drawingml/2006/main" xmlns:p="http://schemas.openxmlformats.org/presentationml/2006/main" xmlns:r="http://schemas.openxmlformats.org/officeDocument/2006/relationships">
+  <p:cSld>
+    <p:spTree>
+      <p:nvGrpSpPr>
+        <p:cNvPr id="1" name=""/>
+        <p:cNvGrpSpPr/>
+        <p:nvPr/>
+      </p:nvGrpSpPr>
+      <p:grpSpPr/>
+      <p:sp>
+        <p:nvSpPr>
+          <p:cNvPr id="2" name="Rectangle 1"/>
+          <p:cNvSpPr/>
+          <p:nvPr/>
+        </p:nvSpPr>
+        <p:spPr>
+          <a:xfrm>
+            <a:off x="0" y="0"/>
+            <a:ext cx="12191695" cy="1005840"/>
+          </a:xfrm>
+          <a:prstGeom prst="rect">
+            <a:avLst/>
+          </a:prstGeom>
+          <a:solidFill>
+            <a:srgbClr val="0F1E4A"/>
+          </a:solidFill>
+          <a:ln>
+            <a:noFill/>
+          </a:ln>
+        </p:spPr>
+        <p:style>
+          <a:lnRef idx="1">
+            <a:schemeClr val="accent1"/>
+          </a:lnRef>
+          <a:fillRef idx="3">
+            <a:schemeClr val="accent1"/>
+          </a:fillRef>
+          <a:effectRef idx="2">
+            <a:schemeClr val="accent1"/>
+          </a:effectRef>
+          <a:fontRef idx="minor">
+            <a:schemeClr val="lt1"/>
+          </a:fontRef>
+        </p:style>
+        <p:txBody>
+          <a:bodyPr rtlCol="0" anchor="ctr"/>
+          <a:lstStyle/>
+          <a:p>
+            <a:pPr algn="ctr"/>
+          </a:p>
+        </p:txBody>
+      </p:sp>
+      <p:sp>
+        <p:nvSpPr>
+          <p:cNvPr id="3" name="Rectangle 2"/>
+          <p:cNvSpPr/>
+          <p:nvPr/>
+        </p:nvSpPr>
+        <p:spPr>
+          <a:xfrm>
+            <a:off x="0" y="969264"/>
+            <a:ext cx="12191695" cy="36576"/>
+          </a:xfrm>
+          <a:prstGeom prst="rect">
+            <a:avLst/>
+          </a:prstGeom>
+          <a:solidFill>
+            <a:srgbClr val="D97706"/>
+          </a:solidFill>
+          <a:ln>
+            <a:noFill/>
+          </a:ln>
+        </p:spPr>
+        <p:style>
+          <a:lnRef idx="1">
+            <a:schemeClr val="accent1"/>
+          </a:lnRef>
+          <a:fillRef idx="3">
+            <a:schemeClr val="accent1"/>
+          </a:fillRef>
+          <a:effectRef idx="2">
+            <a:schemeClr val="accent1"/>
+          </a:effectRef>
+          <a:fontRef idx="minor">
+            <a:schemeClr val="lt1"/>
+          </a:fontRef>
+        </p:style>
+        <p:txBody>
+          <a:bodyPr rtlCol="0" anchor="ctr"/>
+          <a:lstStyle/>
+          <a:p>
+            <a:pPr algn="ctr"/>
+          </a:p>
+        </p:txBody>
+      </p:sp>
+      <p:sp>
+        <p:nvSpPr>
+          <p:cNvPr id="4" name="TextBox 3"/>
+          <p:cNvSpPr txBox="1"/>
+          <p:nvPr/>
+        </p:nvSpPr>
+        <p:spPr>
+          <a:xfrm>
+            <a:off x="731520" y="164592"/>
+            <a:ext cx="8412480" cy="685800"/>
+          </a:xfrm>
+          <a:prstGeom prst="rect">
+            <a:avLst/>
+          </a:prstGeom>
+          <a:noFill/>
+        </p:spPr>
+        <p:txBody>
+          <a:bodyPr wrap="none">
+            <a:spAutoFit/>
+          </a:bodyPr>
+          <a:lstStyle/>
+          <a:p>
+            <a:pPr>
+              <a:defRPr b="1" sz="2100">
+                <a:solidFill>
+                  <a:srgbClr val="F8FAFC"/>
+                </a:solidFill>
+              </a:defRPr>
+            </a:pPr>
+            <a:r>
+              <a:t>🎯 Exam Booster &amp; Review: TCP Flow &amp; Congestion Control</a:t>
+            </a:r>
+          </a:p>
+        </p:txBody>
+      </p:sp>
+      <p:sp>
+        <p:nvSpPr>
+          <p:cNvPr id="5" name="TextBox 4"/>
+          <p:cNvSpPr txBox="1"/>
+          <p:nvPr/>
+        </p:nvSpPr>
+        <p:spPr>
+          <a:xfrm>
+            <a:off x="8229600" y="164592"/>
+            <a:ext cx="3291840" cy="685800"/>
+          </a:xfrm>
+          <a:prstGeom prst="rect">
+            <a:avLst/>
+          </a:prstGeom>
+          <a:noFill/>
+        </p:spPr>
+        <p:txBody>
+          <a:bodyPr wrap="none">
+            <a:spAutoFit/>
+          </a:bodyPr>
+          <a:lstStyle/>
+          <a:p>
+            <a:pPr algn="r">
+              <a:defRPr b="1" sz="1300">
+                <a:solidFill>
+                  <a:srgbClr val="D97706"/>
+                </a:solidFill>
+              </a:defRPr>
+            </a:pPr>
+            <a:r>
+              <a:t>M2.1.4</a:t>
+            </a:r>
+          </a:p>
+        </p:txBody>
+      </p:sp>
+      <p:sp>
+        <p:nvSpPr>
+          <p:cNvPr id="6" name="Rounded Rectangle 5"/>
+          <p:cNvSpPr/>
+          <p:nvPr/>
+        </p:nvSpPr>
+        <p:spPr>
+          <a:xfrm>
+            <a:off x="731520" y="1234440"/>
+            <a:ext cx="5303520" cy="4892040"/>
+          </a:xfrm>
+          <a:prstGeom prst="roundRect">
+            <a:avLst/>
+          </a:prstGeom>
+          <a:solidFill>
+            <a:srgbClr val="FEF3C7"/>
+          </a:solidFill>
+          <a:ln w="19050">
+            <a:solidFill>
+              <a:srgbClr val="D97706"/>
+            </a:solidFill>
+          </a:ln>
+        </p:spPr>
+        <p:style>
+          <a:lnRef idx="1">
+            <a:schemeClr val="accent1"/>
+          </a:lnRef>
+          <a:fillRef idx="3">
+            <a:schemeClr val="accent1"/>
+          </a:fillRef>
+          <a:effectRef idx="2">
+            <a:schemeClr val="accent1"/>
+          </a:effectRef>
+          <a:fontRef idx="minor">
+            <a:schemeClr val="lt1"/>
+          </a:fontRef>
+        </p:style>
+        <p:txBody>
+          <a:bodyPr rtlCol="0" anchor="ctr"/>
+          <a:lstStyle/>
+          <a:p>
+            <a:pPr algn="ctr"/>
+          </a:p>
+        </p:txBody>
+      </p:sp>
+      <p:sp>
+        <p:nvSpPr>
+          <p:cNvPr id="7" name="TextBox 6"/>
+          <p:cNvSpPr txBox="1"/>
+          <p:nvPr/>
+        </p:nvSpPr>
+        <p:spPr>
+          <a:xfrm>
+            <a:off x="914400" y="1371600"/>
+            <a:ext cx="4937760" cy="4572000"/>
+          </a:xfrm>
+          <a:prstGeom prst="rect">
+            <a:avLst/>
+          </a:prstGeom>
+          <a:noFill/>
+        </p:spPr>
+        <p:txBody>
+          <a:bodyPr wrap="square">
+            <a:spAutoFit/>
+          </a:bodyPr>
+          <a:lstStyle/>
+          <a:p>
+            <a:pPr>
+              <a:spcAft>
+                <a:spcPts val="1000"/>
+              </a:spcAft>
+              <a:defRPr b="1" sz="1450">
+                <a:solidFill>
+                  <a:srgbClr val="D97706"/>
+                </a:solidFill>
+              </a:defRPr>
+            </a:pPr>
+            <a:r>
+              <a:t>📚 KTU High-Yield Questions (K3 Apply)</a:t>
+            </a:r>
+          </a:p>
+          <a:p>
+            <a:pPr>
+              <a:spcAft>
+                <a:spcPts val="700"/>
+              </a:spcAft>
+              <a:defRPr sz="1200">
+                <a:solidFill>
+                  <a:srgbClr val="0F172A"/>
+                </a:solidFill>
+              </a:defRPr>
+            </a:pPr>
+            <a:r>
+              <a:t>Q: Explain TCP Sliding Window flow control and how the receiver window `rwnd` prevents buffer overrun. (7 Marks)</a:t>
+            </a:r>
+          </a:p>
+          <a:p>
+            <a:pPr>
+              <a:spcAft>
+                <a:spcPts val="700"/>
+              </a:spcAft>
+              <a:defRPr sz="1200">
+                <a:solidFill>
+                  <a:srgbClr val="0F172A"/>
+                </a:solidFill>
+              </a:defRPr>
+            </a:pPr>
+            <a:r>
+              <a:t>Q: What is Silly Window Syndrome? Explain Nagle's algorithm and Clark's solution with examples. (8 Marks)</a:t>
+            </a:r>
+          </a:p>
+          <a:p>
+            <a:pPr>
+              <a:spcAft>
+                <a:spcPts val="700"/>
+              </a:spcAft>
+              <a:defRPr sz="1200">
+                <a:solidFill>
+                  <a:srgbClr val="0F172A"/>
+                </a:solidFill>
+              </a:defRPr>
+            </a:pPr>
+            <a:r>
+              <a:t>Q: Compare TCP Tahoe and TCP Reno congestion control algorithms with a neat graph plotting `cwnd` versus Transmission RTTs. (8 Marks)</a:t>
+            </a:r>
+          </a:p>
+        </p:txBody>
+      </p:sp>
+      <p:sp>
+        <p:nvSpPr>
+          <p:cNvPr id="8" name="Rounded Rectangle 7"/>
+          <p:cNvSpPr/>
+          <p:nvPr/>
+        </p:nvSpPr>
+        <p:spPr>
+          <a:xfrm>
+            <a:off x="6309360" y="1234440"/>
+            <a:ext cx="5212080" cy="4892040"/>
+          </a:xfrm>
+          <a:prstGeom prst="roundRect">
+            <a:avLst/>
+          </a:prstGeom>
+          <a:solidFill>
+            <a:srgbClr val="EEF2FF"/>
+          </a:solidFill>
+          <a:ln w="19050">
+            <a:solidFill>
+              <a:srgbClr val="0E7490"/>
+            </a:solidFill>
+          </a:ln>
+        </p:spPr>
+        <p:style>
+          <a:lnRef idx="1">
+            <a:schemeClr val="accent1"/>
+          </a:lnRef>
+          <a:fillRef idx="3">
+            <a:schemeClr val="accent1"/>
+          </a:fillRef>
+          <a:effectRef idx="2">
+            <a:schemeClr val="accent1"/>
+          </a:effectRef>
+          <a:fontRef idx="minor">
+            <a:schemeClr val="lt1"/>
+          </a:fontRef>
+        </p:style>
+        <p:txBody>
+          <a:bodyPr rtlCol="0" anchor="ctr"/>
+          <a:lstStyle/>
+          <a:p>
+            <a:pPr algn="ctr"/>
+          </a:p>
+        </p:txBody>
+      </p:sp>
+      <p:sp>
+        <p:nvSpPr>
+          <p:cNvPr id="9" name="TextBox 8"/>
+          <p:cNvSpPr txBox="1"/>
+          <p:nvPr/>
+        </p:nvSpPr>
+        <p:spPr>
+          <a:xfrm>
+            <a:off x="6492240" y="1371600"/>
+            <a:ext cx="4846320" cy="4572000"/>
+          </a:xfrm>
+          <a:prstGeom prst="rect">
+            <a:avLst/>
+          </a:prstGeom>
+          <a:noFill/>
+        </p:spPr>
+        <p:txBody>
+          <a:bodyPr wrap="square">
+            <a:spAutoFit/>
+          </a:bodyPr>
+          <a:lstStyle/>
+          <a:p>
+            <a:pPr>
+              <a:spcAft>
+                <a:spcPts val="1000"/>
+              </a:spcAft>
+              <a:defRPr b="1" sz="1450">
+                <a:solidFill>
+                  <a:srgbClr val="0E7490"/>
+                </a:solidFill>
+              </a:defRPr>
+            </a:pPr>
+            <a:r>
+              <a:t>💡 Critical Conceptual Takeaways</a:t>
+            </a:r>
+          </a:p>
+          <a:p>
+            <a:pPr>
+              <a:spcAft>
+                <a:spcPts val="600"/>
+              </a:spcAft>
+              <a:defRPr sz="1200">
+                <a:solidFill>
+                  <a:srgbClr val="0F172A"/>
+                </a:solidFill>
+              </a:defRPr>
+            </a:pPr>
+            <a:r>
+              <a:t>✔ Flow control is receiver-driven (`rwnd`); Congestion control is network-driven (`cwnd`).</a:t>
+            </a:r>
+          </a:p>
+          <a:p>
+            <a:pPr>
+              <a:spcAft>
+                <a:spcPts val="600"/>
+              </a:spcAft>
+              <a:defRPr sz="1200">
+                <a:solidFill>
+                  <a:srgbClr val="0F172A"/>
+                </a:solidFill>
+              </a:defRPr>
+            </a:pPr>
+            <a:r>
+              <a:t>✔ Effective transmission window is the minimum of `cwnd` and `rwnd`.</a:t>
+            </a:r>
+          </a:p>
+          <a:p>
+            <a:pPr>
+              <a:spcAft>
+                <a:spcPts val="600"/>
+              </a:spcAft>
+              <a:defRPr sz="1200">
+                <a:solidFill>
+                  <a:srgbClr val="0F172A"/>
+                </a:solidFill>
+              </a:defRPr>
+            </a:pPr>
+            <a:r>
+              <a:t>✔ TCP Reno avoids slow start upon 3 duplicate ACKs via Fast Retransmit and Fast Recovery.</a:t>
+            </a:r>
+          </a:p>
+        </p:txBody>
+      </p:sp>
+      <p:sp>
+        <p:nvSpPr>
+          <p:cNvPr id="10" name="TextBox 9"/>
+          <p:cNvSpPr txBox="1"/>
+          <p:nvPr/>
+        </p:nvSpPr>
+        <p:spPr>
+          <a:xfrm>
+            <a:off x="731520" y="6327648"/>
+            <a:ext cx="10789920" cy="320040"/>
+          </a:xfrm>
+          <a:prstGeom prst="rect">
+            <a:avLst/>
+          </a:prstGeom>
+          <a:noFill/>
+        </p:spPr>
+        <p:txBody>
+          <a:bodyPr wrap="none">
+            <a:spAutoFit/>
+          </a:bodyPr>
+          <a:lstStyle/>
+          <a:p>
+            <a:pPr>
+              <a:defRPr sz="950">
+                <a:solidFill>
+                  <a:srgbClr val="64748B"/>
+                </a:solidFill>
+              </a:defRPr>
+            </a:pPr>
+            <a:r>
+              <a:t>PCCST501 Computer Networks | KTU 2024 Scheme | Prof. Anju Markose | Assistant Professor, Dept. of CSE | VJCET</a:t>
+            </a:r>
+          </a:p>
+        </p:txBody>
+      </p:sp>
+      <p:sp>
+        <p:nvSpPr>
+          <p:cNvPr id="11" name="TextBox 10"/>
+          <p:cNvSpPr txBox="1"/>
+          <p:nvPr/>
+        </p:nvSpPr>
+        <p:spPr>
+          <a:xfrm>
+            <a:off x="6858000" y="6327648"/>
+            <a:ext cx="4572000" cy="320040"/>
+          </a:xfrm>
+          <a:prstGeom prst="rect">
+            <a:avLst/>
+          </a:prstGeom>
+          <a:noFill/>
+        </p:spPr>
+        <p:txBody>
+          <a:bodyPr wrap="none">
+            <a:spAutoFit/>
+          </a:bodyPr>
+          <a:lstStyle/>
+          <a:p>
+            <a:pPr algn="r">
+              <a:defRPr sz="950">
+                <a:solidFill>
+                  <a:srgbClr val="64748B"/>
+                </a:solidFill>
+              </a:defRPr>
+            </a:pPr>
+            <a:r>
+              <a:t>Dept. of CSE, VJCET</a:t>
             </a:r>
           </a:p>
         </p:txBody>
